--- a/docs/ppt-book/projets/Projet3-Bilan-des-ventes.pptx
+++ b/docs/ppt-book/projets/Projet3-Bilan-des-ventes.pptx
@@ -111,19 +111,19 @@
   <p:extLst>
     <p:ext uri="{521415D9-36F7-43E2-AB2F-B90AF26B5E84}">
       <p14:sectionLst xmlns:p14="http://schemas.microsoft.com/office/powerpoint/2010/main">
-        <p14:section name="الملخص" id="{2896c06e-85d6-5074-c1da-8e6d74e9afe7}">
+        <p14:section name="الملخص" id="{b7a59ce6-76bb-e06b-64f6-92e217db7b3c}">
           <p14:sldIdLst>
             <p14:sldId id="256"/>
             <p14:sldId id="257"/>
           </p14:sldIdLst>
         </p14:section>
-        <p14:section name="التحليل" id="{3ca68466-8689-762b-5b9b-5789917dce30}">
+        <p14:section name="التحليل" id="{eecf919b-7490-b8d8-cbbf-5857a33fd493}">
           <p14:sldIdLst>
             <p14:sldId id="258"/>
             <p14:sldId id="259"/>
           </p14:sldIdLst>
         </p14:section>
-        <p14:section name="القرارات" id="{b70f998c-7a9f-9608-c357-95dc1cf7042b}">
+        <p14:section name="القرارات" id="{b578e17b-93e9-885b-5b15-57a87d927bda}">
           <p14:sldIdLst>
             <p14:sldId id="260"/>
           </p14:sldIdLst>
